--- a/TA6/TA6.pptx
+++ b/TA6/TA6.pptx
@@ -287,7 +287,7 @@
           <a:p>
             <a:fld id="{8CAA52B5-77FE-4A80-AFEA-FC2B708EFBF0}" type="datetimeFigureOut">
               <a:rPr lang="he-IL" smtClean="0"/>
-              <a:t>י"א/כסלו/תשפ"ה</a:t>
+              <a:t>י"א/כסלו/תשפ"ו</a:t>
             </a:fld>
             <a:endParaRPr lang="he-IL"/>
           </a:p>
@@ -3735,7 +3735,7 @@
           <a:p>
             <a:fld id="{48A87A34-81AB-432B-8DAE-1953F412C126}" type="datetimeFigureOut">
               <a:rPr lang="en-US" smtClean="0"/>
-              <a:t>12/12/2024</a:t>
+              <a:t>12/1/2025</a:t>
             </a:fld>
             <a:endParaRPr lang="en-US" dirty="0"/>
           </a:p>
@@ -4023,7 +4023,7 @@
             <a:fld id="{48A87A34-81AB-432B-8DAE-1953F412C126}" type="datetimeFigureOut">
               <a:rPr lang="en-US" smtClean="0"/>
               <a:pPr/>
-              <a:t>12/12/2024</a:t>
+              <a:t>12/1/2025</a:t>
             </a:fld>
             <a:endParaRPr lang="en-US" dirty="0"/>
           </a:p>
@@ -4217,7 +4217,7 @@
             <a:fld id="{48A87A34-81AB-432B-8DAE-1953F412C126}" type="datetimeFigureOut">
               <a:rPr lang="en-US" smtClean="0"/>
               <a:pPr/>
-              <a:t>12/12/2024</a:t>
+              <a:t>12/1/2025</a:t>
             </a:fld>
             <a:endParaRPr lang="en-US" dirty="0"/>
           </a:p>
@@ -4480,7 +4480,7 @@
             <a:fld id="{48A87A34-81AB-432B-8DAE-1953F412C126}" type="datetimeFigureOut">
               <a:rPr lang="en-US" smtClean="0"/>
               <a:pPr/>
-              <a:t>12/12/2024</a:t>
+              <a:t>12/1/2025</a:t>
             </a:fld>
             <a:endParaRPr lang="en-US" dirty="0"/>
           </a:p>
@@ -4906,7 +4906,7 @@
             <a:fld id="{48A87A34-81AB-432B-8DAE-1953F412C126}" type="datetimeFigureOut">
               <a:rPr lang="en-US" smtClean="0"/>
               <a:pPr/>
-              <a:t>12/12/2024</a:t>
+              <a:t>12/1/2025</a:t>
             </a:fld>
             <a:endParaRPr lang="en-US" dirty="0"/>
           </a:p>
@@ -5454,7 +5454,7 @@
             <a:fld id="{48A87A34-81AB-432B-8DAE-1953F412C126}" type="datetimeFigureOut">
               <a:rPr lang="en-US" smtClean="0"/>
               <a:pPr/>
-              <a:t>12/12/2024</a:t>
+              <a:t>12/1/2025</a:t>
             </a:fld>
             <a:endParaRPr lang="en-US" dirty="0"/>
           </a:p>
@@ -6296,7 +6296,7 @@
             <a:fld id="{48A87A34-81AB-432B-8DAE-1953F412C126}" type="datetimeFigureOut">
               <a:rPr lang="en-US" smtClean="0"/>
               <a:pPr/>
-              <a:t>12/12/2024</a:t>
+              <a:t>12/1/2025</a:t>
             </a:fld>
             <a:endParaRPr lang="en-US" dirty="0"/>
           </a:p>
@@ -6467,7 +6467,7 @@
           <a:p>
             <a:fld id="{48A87A34-81AB-432B-8DAE-1953F412C126}" type="datetimeFigureOut">
               <a:rPr lang="en-US" smtClean="0"/>
-              <a:t>12/12/2024</a:t>
+              <a:t>12/1/2025</a:t>
             </a:fld>
             <a:endParaRPr lang="en-US" dirty="0"/>
           </a:p>
@@ -6651,7 +6651,7 @@
           <a:p>
             <a:fld id="{48A87A34-81AB-432B-8DAE-1953F412C126}" type="datetimeFigureOut">
               <a:rPr lang="en-US" smtClean="0"/>
-              <a:t>12/12/2024</a:t>
+              <a:t>12/1/2025</a:t>
             </a:fld>
             <a:endParaRPr lang="en-US" dirty="0"/>
           </a:p>
@@ -6855,7 +6855,7 @@
           <a:p>
             <a:fld id="{1D8BD707-D9CF-40AE-B4C6-C98DA3205C09}" type="datetimeFigureOut">
               <a:rPr lang="en-US"/>
-              <a:t>12/12/2024</a:t>
+              <a:t>12/1/2025</a:t>
             </a:fld>
             <a:endParaRPr lang="en-US"/>
           </a:p>
@@ -7015,7 +7015,7 @@
           <a:p>
             <a:fld id="{48A87A34-81AB-432B-8DAE-1953F412C126}" type="datetimeFigureOut">
               <a:rPr lang="en-US" smtClean="0"/>
-              <a:t>12/12/2024</a:t>
+              <a:t>12/1/2025</a:t>
             </a:fld>
             <a:endParaRPr lang="en-US" dirty="0"/>
           </a:p>
@@ -7263,7 +7263,7 @@
           <a:p>
             <a:fld id="{48A87A34-81AB-432B-8DAE-1953F412C126}" type="datetimeFigureOut">
               <a:rPr lang="en-US" smtClean="0"/>
-              <a:t>12/12/2024</a:t>
+              <a:t>12/1/2025</a:t>
             </a:fld>
             <a:endParaRPr lang="en-US" dirty="0"/>
           </a:p>
@@ -7500,7 +7500,7 @@
           <a:p>
             <a:fld id="{48A87A34-81AB-432B-8DAE-1953F412C126}" type="datetimeFigureOut">
               <a:rPr lang="en-US" smtClean="0"/>
-              <a:t>12/12/2024</a:t>
+              <a:t>12/1/2025</a:t>
             </a:fld>
             <a:endParaRPr lang="en-US" dirty="0"/>
           </a:p>
@@ -7873,7 +7873,7 @@
           <a:p>
             <a:fld id="{48A87A34-81AB-432B-8DAE-1953F412C126}" type="datetimeFigureOut">
               <a:rPr lang="en-US" smtClean="0"/>
-              <a:t>12/12/2024</a:t>
+              <a:t>12/1/2025</a:t>
             </a:fld>
             <a:endParaRPr lang="en-US" dirty="0"/>
           </a:p>
@@ -7991,7 +7991,7 @@
           <a:p>
             <a:fld id="{48A87A34-81AB-432B-8DAE-1953F412C126}" type="datetimeFigureOut">
               <a:rPr lang="en-US" smtClean="0"/>
-              <a:t>12/12/2024</a:t>
+              <a:t>12/1/2025</a:t>
             </a:fld>
             <a:endParaRPr lang="en-US" dirty="0"/>
           </a:p>
@@ -8086,7 +8086,7 @@
           <a:p>
             <a:fld id="{48A87A34-81AB-432B-8DAE-1953F412C126}" type="datetimeFigureOut">
               <a:rPr lang="en-US" smtClean="0"/>
-              <a:t>12/12/2024</a:t>
+              <a:t>12/1/2025</a:t>
             </a:fld>
             <a:endParaRPr lang="en-US" dirty="0"/>
           </a:p>
@@ -8337,7 +8337,7 @@
           <a:p>
             <a:fld id="{48A87A34-81AB-432B-8DAE-1953F412C126}" type="datetimeFigureOut">
               <a:rPr lang="en-US" smtClean="0"/>
-              <a:t>12/12/2024</a:t>
+              <a:t>12/1/2025</a:t>
             </a:fld>
             <a:endParaRPr lang="en-US" dirty="0"/>
           </a:p>
@@ -8625,7 +8625,7 @@
             <a:fld id="{48A87A34-81AB-432B-8DAE-1953F412C126}" type="datetimeFigureOut">
               <a:rPr lang="en-US" smtClean="0"/>
               <a:pPr/>
-              <a:t>12/12/2024</a:t>
+              <a:t>12/1/2025</a:t>
             </a:fld>
             <a:endParaRPr lang="en-US" dirty="0"/>
           </a:p>
@@ -8839,7 +8839,7 @@
             <a:fld id="{48A87A34-81AB-432B-8DAE-1953F412C126}" type="datetimeFigureOut">
               <a:rPr lang="en-US" smtClean="0"/>
               <a:pPr/>
-              <a:t>12/12/2024</a:t>
+              <a:t>12/1/2025</a:t>
             </a:fld>
             <a:endParaRPr lang="en-US" dirty="0"/>
           </a:p>
@@ -9662,7 +9662,7 @@
             </a:r>
             <a:r>
               <a:rPr lang="he-IL" sz="3200" dirty="0"/>
-              <a:t> על אספים שאנחנו יצרנו.</a:t>
+              <a:t> על אוספים שאנחנו יצרנו.</a:t>
             </a:r>
           </a:p>
           <a:p>
